--- a/01_분석결과/시장분석_리브랜딩유형진단.pptx
+++ b/01_분석결과/시장분석_리브랜딩유형진단.pptx
@@ -7430,7 +7430,7 @@
                 <a:ea typeface="맑은 고딕" pitchFamily="34" charset="-122"/>
                 <a:cs typeface="맑은 고딕" pitchFamily="34" charset="-120"/>
               </a:rPr>
-              <a:t>0.79%→1.87%</a:t>
+              <a:t>0.34%→0.52%</a:t>
             </a:r>
             <a:endParaRPr lang="en-US" sz="3000" dirty="0"/>
           </a:p>
@@ -7492,7 +7492,7 @@
                 <a:ea typeface="맑은 고딕" pitchFamily="34" charset="-122"/>
                 <a:cs typeface="맑은 고딕" pitchFamily="34" charset="-120"/>
               </a:rPr>
-              <a:t>(2021→2025, 계속 상승)</a:t>
+              <a:t>(2021→2025 — 브랜드 전체보다 오래 버텼다, 2024년 0.53% 정점·2025년 보합)</a:t>
             </a:r>
             <a:endParaRPr lang="en-US" sz="1200" dirty="0"/>
           </a:p>
@@ -10148,7 +10148,7 @@
                 <a:ea typeface="맑은 고딕" pitchFamily="34" charset="-122"/>
                 <a:cs typeface="맑은 고딕" pitchFamily="34" charset="-120"/>
               </a:rPr>
-              <a:t>세분화 5조건 — 4개는 통과, 1개에서 무너졌다</a:t>
+              <a:t>세분화 5조건 — 3개는 통과, 2개에서 무너졌다</a:t>
             </a:r>
             <a:endParaRPr lang="en-US" sz="3000" dirty="0"/>
           </a:p>
